--- a/Presentations/AVR Live Class 9.pptx
+++ b/Presentations/AVR Live Class 9.pptx
@@ -289,215 +289,25 @@
   <pc:docChgLst>
     <pc:chgData name="Sreejith Rajan" userId="ec11bca0e4bee75f" providerId="LiveId" clId="{7B4F392D-EAB3-4CE7-903E-F84869825F47}"/>
     <pc:docChg chg="undo custSel addSld delSld modSld sldOrd">
-      <pc:chgData name="Sreejith Rajan" userId="ec11bca0e4bee75f" providerId="LiveId" clId="{7B4F392D-EAB3-4CE7-903E-F84869825F47}" dt="2025-09-26T16:02:10.979" v="2135" actId="207"/>
+      <pc:chgData name="Sreejith Rajan" userId="ec11bca0e4bee75f" providerId="LiveId" clId="{7B4F392D-EAB3-4CE7-903E-F84869825F47}" dt="2025-12-02T14:00:18.810" v="2138"/>
       <pc:docMkLst>
         <pc:docMk/>
       </pc:docMkLst>
-      <pc:sldChg chg="modSp mod">
-        <pc:chgData name="Sreejith Rajan" userId="ec11bca0e4bee75f" providerId="LiveId" clId="{7B4F392D-EAB3-4CE7-903E-F84869825F47}" dt="2025-09-26T13:36:29.868" v="1816" actId="20577"/>
-        <pc:sldMkLst>
-          <pc:docMk/>
-          <pc:sldMk cId="0" sldId="256"/>
-        </pc:sldMkLst>
-        <pc:spChg chg="mod">
-          <ac:chgData name="Sreejith Rajan" userId="ec11bca0e4bee75f" providerId="LiveId" clId="{7B4F392D-EAB3-4CE7-903E-F84869825F47}" dt="2025-09-26T13:36:29.868" v="1816" actId="20577"/>
-          <ac:spMkLst>
-            <pc:docMk/>
-            <pc:sldMk cId="0" sldId="256"/>
-            <ac:spMk id="33" creationId="{00000000-0000-0000-0000-000000000000}"/>
-          </ac:spMkLst>
-        </pc:spChg>
-      </pc:sldChg>
-      <pc:sldChg chg="addSp modSp del mod">
-        <pc:chgData name="Sreejith Rajan" userId="ec11bca0e4bee75f" providerId="LiveId" clId="{7B4F392D-EAB3-4CE7-903E-F84869825F47}" dt="2025-09-26T13:36:34.936" v="1819" actId="47"/>
-        <pc:sldMkLst>
-          <pc:docMk/>
-          <pc:sldMk cId="0" sldId="258"/>
-        </pc:sldMkLst>
-      </pc:sldChg>
-      <pc:sldChg chg="addSp delSp modSp add del mod ord">
-        <pc:chgData name="Sreejith Rajan" userId="ec11bca0e4bee75f" providerId="LiveId" clId="{7B4F392D-EAB3-4CE7-903E-F84869825F47}" dt="2025-09-26T13:36:37.995" v="1822" actId="47"/>
-        <pc:sldMkLst>
-          <pc:docMk/>
-          <pc:sldMk cId="1389626550" sldId="267"/>
-        </pc:sldMkLst>
-      </pc:sldChg>
-      <pc:sldChg chg="delSp modSp mod">
-        <pc:chgData name="Sreejith Rajan" userId="ec11bca0e4bee75f" providerId="LiveId" clId="{7B4F392D-EAB3-4CE7-903E-F84869825F47}" dt="2025-09-26T13:37:24.554" v="1861" actId="20577"/>
-        <pc:sldMkLst>
-          <pc:docMk/>
-          <pc:sldMk cId="2517281589" sldId="274"/>
-        </pc:sldMkLst>
-        <pc:spChg chg="mod">
-          <ac:chgData name="Sreejith Rajan" userId="ec11bca0e4bee75f" providerId="LiveId" clId="{7B4F392D-EAB3-4CE7-903E-F84869825F47}" dt="2025-09-26T13:37:24.554" v="1861" actId="20577"/>
-          <ac:spMkLst>
-            <pc:docMk/>
-            <pc:sldMk cId="2517281589" sldId="274"/>
-            <ac:spMk id="54" creationId="{F5C408E8-BC47-B2C2-7462-C129AFFB4F4F}"/>
-          </ac:spMkLst>
-        </pc:spChg>
-      </pc:sldChg>
-      <pc:sldChg chg="modSp del mod ord">
-        <pc:chgData name="Sreejith Rajan" userId="ec11bca0e4bee75f" providerId="LiveId" clId="{7B4F392D-EAB3-4CE7-903E-F84869825F47}" dt="2025-09-26T13:36:34.298" v="1818" actId="47"/>
-        <pc:sldMkLst>
-          <pc:docMk/>
-          <pc:sldMk cId="682396941" sldId="282"/>
-        </pc:sldMkLst>
-      </pc:sldChg>
-      <pc:sldChg chg="addSp modSp del mod ord">
-        <pc:chgData name="Sreejith Rajan" userId="ec11bca0e4bee75f" providerId="LiveId" clId="{7B4F392D-EAB3-4CE7-903E-F84869825F47}" dt="2025-09-26T13:36:36.779" v="1821" actId="47"/>
-        <pc:sldMkLst>
-          <pc:docMk/>
-          <pc:sldMk cId="3362503428" sldId="283"/>
-        </pc:sldMkLst>
-      </pc:sldChg>
-      <pc:sldChg chg="addSp delSp modSp del mod">
-        <pc:chgData name="Sreejith Rajan" userId="ec11bca0e4bee75f" providerId="LiveId" clId="{7B4F392D-EAB3-4CE7-903E-F84869825F47}" dt="2025-09-26T13:36:35.786" v="1820" actId="47"/>
-        <pc:sldMkLst>
-          <pc:docMk/>
-          <pc:sldMk cId="2771709912" sldId="285"/>
-        </pc:sldMkLst>
-      </pc:sldChg>
-      <pc:sldChg chg="delSp del mod">
-        <pc:chgData name="Sreejith Rajan" userId="ec11bca0e4bee75f" providerId="LiveId" clId="{7B4F392D-EAB3-4CE7-903E-F84869825F47}" dt="2025-09-19T08:54:52.742" v="755" actId="47"/>
-        <pc:sldMkLst>
-          <pc:docMk/>
-          <pc:sldMk cId="321485736" sldId="286"/>
-        </pc:sldMkLst>
-      </pc:sldChg>
-      <pc:sldChg chg="modSp mod">
-        <pc:chgData name="Sreejith Rajan" userId="ec11bca0e4bee75f" providerId="LiveId" clId="{7B4F392D-EAB3-4CE7-903E-F84869825F47}" dt="2025-09-26T13:36:49.232" v="1834" actId="20577"/>
-        <pc:sldMkLst>
-          <pc:docMk/>
-          <pc:sldMk cId="3959199433" sldId="287"/>
-        </pc:sldMkLst>
-        <pc:spChg chg="mod">
-          <ac:chgData name="Sreejith Rajan" userId="ec11bca0e4bee75f" providerId="LiveId" clId="{7B4F392D-EAB3-4CE7-903E-F84869825F47}" dt="2025-09-26T13:36:49.232" v="1834" actId="20577"/>
-          <ac:spMkLst>
-            <pc:docMk/>
-            <pc:sldMk cId="3959199433" sldId="287"/>
-            <ac:spMk id="54" creationId="{C4CE2FAD-1A13-21FB-4CDB-D7E0702E4157}"/>
-          </ac:spMkLst>
-        </pc:spChg>
-        <pc:spChg chg="mod">
-          <ac:chgData name="Sreejith Rajan" userId="ec11bca0e4bee75f" providerId="LiveId" clId="{7B4F392D-EAB3-4CE7-903E-F84869825F47}" dt="2025-09-19T09:13:01.089" v="1066" actId="27636"/>
-          <ac:spMkLst>
-            <pc:docMk/>
-            <pc:sldMk cId="3959199433" sldId="287"/>
-            <ac:spMk id="55" creationId="{FF1E4D12-E5A8-7B19-694A-8370FEB4E421}"/>
-          </ac:spMkLst>
-        </pc:spChg>
-      </pc:sldChg>
-      <pc:sldChg chg="del">
-        <pc:chgData name="Sreejith Rajan" userId="ec11bca0e4bee75f" providerId="LiveId" clId="{7B4F392D-EAB3-4CE7-903E-F84869825F47}" dt="2025-09-19T09:13:31.674" v="1068" actId="47"/>
-        <pc:sldMkLst>
-          <pc:docMk/>
-          <pc:sldMk cId="1933302962" sldId="288"/>
-        </pc:sldMkLst>
-      </pc:sldChg>
-      <pc:sldChg chg="del">
-        <pc:chgData name="Sreejith Rajan" userId="ec11bca0e4bee75f" providerId="LiveId" clId="{7B4F392D-EAB3-4CE7-903E-F84869825F47}" dt="2025-09-19T09:13:25.785" v="1067" actId="47"/>
-        <pc:sldMkLst>
-          <pc:docMk/>
-          <pc:sldMk cId="1380718396" sldId="289"/>
-        </pc:sldMkLst>
-      </pc:sldChg>
-      <pc:sldChg chg="addSp delSp modSp add del mod">
-        <pc:chgData name="Sreejith Rajan" userId="ec11bca0e4bee75f" providerId="LiveId" clId="{7B4F392D-EAB3-4CE7-903E-F84869825F47}" dt="2025-09-26T13:36:40.310" v="1825" actId="47"/>
-        <pc:sldMkLst>
-          <pc:docMk/>
-          <pc:sldMk cId="4163967858" sldId="290"/>
-        </pc:sldMkLst>
-      </pc:sldChg>
-      <pc:sldChg chg="delSp modSp add del mod">
-        <pc:chgData name="Sreejith Rajan" userId="ec11bca0e4bee75f" providerId="LiveId" clId="{7B4F392D-EAB3-4CE7-903E-F84869825F47}" dt="2025-09-26T13:36:39.459" v="1824" actId="47"/>
-        <pc:sldMkLst>
-          <pc:docMk/>
-          <pc:sldMk cId="3054169711" sldId="291"/>
-        </pc:sldMkLst>
-      </pc:sldChg>
-      <pc:sldChg chg="addSp modSp add mod">
-        <pc:chgData name="Sreejith Rajan" userId="ec11bca0e4bee75f" providerId="LiveId" clId="{7B4F392D-EAB3-4CE7-903E-F84869825F47}" dt="2025-09-19T09:06:10.828" v="1002" actId="5793"/>
-        <pc:sldMkLst>
-          <pc:docMk/>
-          <pc:sldMk cId="1690133944" sldId="292"/>
-        </pc:sldMkLst>
-        <pc:spChg chg="mod">
-          <ac:chgData name="Sreejith Rajan" userId="ec11bca0e4bee75f" providerId="LiveId" clId="{7B4F392D-EAB3-4CE7-903E-F84869825F47}" dt="2025-09-19T09:04:40.348" v="970" actId="20577"/>
-          <ac:spMkLst>
-            <pc:docMk/>
-            <pc:sldMk cId="1690133944" sldId="292"/>
-            <ac:spMk id="54" creationId="{EDC9C741-9EF9-AD1A-B10B-C0F0FD0E5589}"/>
-          </ac:spMkLst>
-        </pc:spChg>
-        <pc:spChg chg="mod">
-          <ac:chgData name="Sreejith Rajan" userId="ec11bca0e4bee75f" providerId="LiveId" clId="{7B4F392D-EAB3-4CE7-903E-F84869825F47}" dt="2025-09-19T09:06:10.828" v="1002" actId="5793"/>
-          <ac:spMkLst>
-            <pc:docMk/>
-            <pc:sldMk cId="1690133944" sldId="292"/>
-            <ac:spMk id="55" creationId="{26607F08-7416-A9D7-E979-6607C70A9BA6}"/>
-          </ac:spMkLst>
-        </pc:spChg>
-      </pc:sldChg>
-      <pc:sldChg chg="delSp modSp add del mod ord">
-        <pc:chgData name="Sreejith Rajan" userId="ec11bca0e4bee75f" providerId="LiveId" clId="{7B4F392D-EAB3-4CE7-903E-F84869825F47}" dt="2025-09-26T13:36:33.418" v="1817" actId="47"/>
-        <pc:sldMkLst>
-          <pc:docMk/>
-          <pc:sldMk cId="1886088078" sldId="293"/>
-        </pc:sldMkLst>
-      </pc:sldChg>
-      <pc:sldChg chg="modSp add mod">
-        <pc:chgData name="Sreejith Rajan" userId="ec11bca0e4bee75f" providerId="LiveId" clId="{7B4F392D-EAB3-4CE7-903E-F84869825F47}" dt="2025-09-26T16:02:10.979" v="2135" actId="207"/>
+      <pc:sldChg chg="delSp modSp add mod">
+        <pc:chgData name="Sreejith Rajan" userId="ec11bca0e4bee75f" providerId="LiveId" clId="{7B4F392D-EAB3-4CE7-903E-F84869825F47}" dt="2025-12-02T14:00:18.810" v="2138"/>
         <pc:sldMkLst>
           <pc:docMk/>
           <pc:sldMk cId="3780731234" sldId="293"/>
         </pc:sldMkLst>
-        <pc:spChg chg="mod">
-          <ac:chgData name="Sreejith Rajan" userId="ec11bca0e4bee75f" providerId="LiveId" clId="{7B4F392D-EAB3-4CE7-903E-F84869825F47}" dt="2025-09-26T13:59:15.652" v="1889" actId="27636"/>
+        <pc:spChg chg="del mod">
+          <ac:chgData name="Sreejith Rajan" userId="ec11bca0e4bee75f" providerId="LiveId" clId="{7B4F392D-EAB3-4CE7-903E-F84869825F47}" dt="2025-12-02T14:00:18.810" v="2138"/>
           <ac:spMkLst>
             <pc:docMk/>
             <pc:sldMk cId="3780731234" sldId="293"/>
-            <ac:spMk id="54" creationId="{60F6E915-346F-0648-5434-0DE850C1C3AB}"/>
-          </ac:spMkLst>
-        </pc:spChg>
-        <pc:spChg chg="mod">
-          <ac:chgData name="Sreejith Rajan" userId="ec11bca0e4bee75f" providerId="LiveId" clId="{7B4F392D-EAB3-4CE7-903E-F84869825F47}" dt="2025-09-26T16:02:10.979" v="2135" actId="207"/>
-          <ac:spMkLst>
-            <pc:docMk/>
-            <pc:sldMk cId="3780731234" sldId="293"/>
-            <ac:spMk id="55" creationId="{91E121BF-B148-C323-2C17-57532AC62F17}"/>
+            <ac:spMk id="7" creationId="{A8D65B8A-3527-8AA9-A4ED-ECE34D3DE41C}"/>
           </ac:spMkLst>
         </pc:spChg>
       </pc:sldChg>
-      <pc:sldChg chg="addSp delSp modSp add del mod">
-        <pc:chgData name="Sreejith Rajan" userId="ec11bca0e4bee75f" providerId="LiveId" clId="{7B4F392D-EAB3-4CE7-903E-F84869825F47}" dt="2025-09-26T13:36:38.704" v="1823" actId="47"/>
-        <pc:sldMkLst>
-          <pc:docMk/>
-          <pc:sldMk cId="812141662" sldId="294"/>
-        </pc:sldMkLst>
-      </pc:sldChg>
-      <pc:sldChg chg="new del">
-        <pc:chgData name="Sreejith Rajan" userId="ec11bca0e4bee75f" providerId="LiveId" clId="{7B4F392D-EAB3-4CE7-903E-F84869825F47}" dt="2025-09-19T09:29:05.345" v="1574" actId="680"/>
-        <pc:sldMkLst>
-          <pc:docMk/>
-          <pc:sldMk cId="4185100054" sldId="294"/>
-        </pc:sldMkLst>
-      </pc:sldChg>
-      <pc:sldMasterChg chg="delSldLayout">
-        <pc:chgData name="Sreejith Rajan" userId="ec11bca0e4bee75f" providerId="LiveId" clId="{7B4F392D-EAB3-4CE7-903E-F84869825F47}" dt="2025-09-26T13:36:35.786" v="1820" actId="47"/>
-        <pc:sldMasterMkLst>
-          <pc:docMk/>
-          <pc:sldMasterMk cId="0" sldId="2147483654"/>
-        </pc:sldMasterMkLst>
-        <pc:sldLayoutChg chg="del">
-          <pc:chgData name="Sreejith Rajan" userId="ec11bca0e4bee75f" providerId="LiveId" clId="{7B4F392D-EAB3-4CE7-903E-F84869825F47}" dt="2025-09-26T13:36:35.786" v="1820" actId="47"/>
-          <pc:sldLayoutMkLst>
-            <pc:docMk/>
-            <pc:sldMasterMk cId="0" sldId="2147483654"/>
-            <pc:sldLayoutMk cId="0" sldId="2147483649"/>
-          </pc:sldLayoutMkLst>
-        </pc:sldLayoutChg>
-      </pc:sldMasterChg>
     </pc:docChg>
   </pc:docChgLst>
 </pc:chgInfo>
@@ -5207,41 +5017,6 @@
               <a:cs typeface="Helvetica Neue"/>
               <a:sym typeface="Helvetica Neue"/>
             </a:endParaRPr>
-          </a:p>
-        </p:txBody>
-      </p:sp>
-      <p:sp>
-        <p:nvSpPr>
-          <p:cNvPr id="7" name="TextBox 6">
-            <a:extLst>
-              <a:ext uri="{FF2B5EF4-FFF2-40B4-BE49-F238E27FC236}">
-                <a16:creationId xmlns:a16="http://schemas.microsoft.com/office/drawing/2014/main" id="{A8D65B8A-3527-8AA9-A4ED-ECE34D3DE41C}"/>
-              </a:ext>
-            </a:extLst>
-          </p:cNvPr>
-          <p:cNvSpPr txBox="1"/>
-          <p:nvPr/>
-        </p:nvSpPr>
-        <p:spPr>
-          <a:xfrm>
-            <a:off x="4379174" y="2263973"/>
-            <a:ext cx="284052" cy="307777"/>
-          </a:xfrm>
-          <a:prstGeom prst="rect">
-            <a:avLst/>
-          </a:prstGeom>
-          <a:noFill/>
-        </p:spPr>
-        <p:txBody>
-          <a:bodyPr wrap="none" rtlCol="0">
-            <a:spAutoFit/>
-          </a:bodyPr>
-          <a:lstStyle/>
-          <a:p>
-            <a:r>
-              <a:rPr lang="en-IN" dirty="0"/>
-              <a:t>1</a:t>
-            </a:r>
           </a:p>
         </p:txBody>
       </p:sp>
